--- a/rapports/septembre/Levis_sept2026.pptx
+++ b/rapports/septembre/Levis_sept2026.pptx
@@ -3207,7 +3207,7 @@
                 </a:solidFill>
                 <a:latin typeface="Arial"/>
               </a:rPr>
-              <a:t>RAPPORT DE PERFORMANCE · 01/09/2026 → 30/09/2026</a:t>
+              <a:t>PERFORMANCE REPORT · 01/09/2026 → 30/09/2026</a:t>
             </a:r>
           </a:p>
         </p:txBody>
@@ -3277,7 +3277,7 @@
                 </a:solidFill>
                 <a:latin typeface="Arial"/>
               </a:rPr>
-              <a:t>COMPARAISON</a:t>
+              <a:t>COMPARISON</a:t>
             </a:r>
           </a:p>
         </p:txBody>
@@ -3347,7 +3347,7 @@
                 </a:solidFill>
                 <a:latin typeface="Arial"/>
               </a:rPr>
-              <a:t>DIFFUSION</a:t>
+              <a:t>REACH</a:t>
             </a:r>
           </a:p>
         </p:txBody>
@@ -3647,7 +3647,7 @@
                 </a:solidFill>
                 <a:latin typeface="Arial"/>
               </a:rPr>
-              <a:t>vs période préc.</a:t>
+              <a:t>vs prev. period</a:t>
             </a:r>
           </a:p>
         </p:txBody>
@@ -3682,7 +3682,7 @@
                 </a:solidFill>
                 <a:latin typeface="Arial"/>
               </a:rPr>
-              <a:t>YTD 961 503</a:t>
+              <a:t>YTD 1 193 411</a:t>
             </a:r>
           </a:p>
         </p:txBody>
@@ -3807,7 +3807,7 @@
                 </a:solidFill>
                 <a:latin typeface="Arial"/>
               </a:rPr>
-              <a:t>CLICS</a:t>
+              <a:t>CLICKS</a:t>
             </a:r>
           </a:p>
         </p:txBody>
@@ -3912,7 +3912,7 @@
                 </a:solidFill>
                 <a:latin typeface="Arial"/>
               </a:rPr>
-              <a:t>vs période préc.</a:t>
+              <a:t>vs prev. period</a:t>
             </a:r>
           </a:p>
         </p:txBody>
@@ -3947,7 +3947,7 @@
                 </a:solidFill>
                 <a:latin typeface="Arial"/>
               </a:rPr>
-              <a:t>YTD 2 927</a:t>
+              <a:t>YTD 3 370</a:t>
             </a:r>
           </a:p>
         </p:txBody>
@@ -4177,7 +4177,7 @@
                 </a:solidFill>
                 <a:latin typeface="Arial"/>
               </a:rPr>
-              <a:t>vs période préc.</a:t>
+              <a:t>vs prev. period</a:t>
             </a:r>
           </a:p>
         </p:txBody>
@@ -4212,7 +4212,7 @@
                 </a:solidFill>
                 <a:latin typeface="Arial"/>
               </a:rPr>
-              <a:t>YTD 0,30 %</a:t>
+              <a:t>YTD 0,28 %</a:t>
             </a:r>
           </a:p>
         </p:txBody>
@@ -4372,7 +4372,7 @@
                 </a:solidFill>
                 <a:latin typeface="Arial"/>
               </a:rPr>
-              <a:t>N/C</a:t>
+              <a:t>N/A</a:t>
             </a:r>
           </a:p>
         </p:txBody>
@@ -4442,7 +4442,7 @@
                 </a:solidFill>
                 <a:latin typeface="Arial"/>
               </a:rPr>
-              <a:t>vs période préc.</a:t>
+              <a:t>vs prev. period</a:t>
             </a:r>
           </a:p>
         </p:txBody>
@@ -4637,7 +4637,7 @@
                 </a:solidFill>
                 <a:latin typeface="Arial"/>
               </a:rPr>
-              <a:t>N/C</a:t>
+              <a:t>N/A</a:t>
             </a:r>
           </a:p>
         </p:txBody>
@@ -4707,7 +4707,7 @@
                 </a:solidFill>
                 <a:latin typeface="Arial"/>
               </a:rPr>
-              <a:t>vs période préc.</a:t>
+              <a:t>vs prev. period</a:t>
             </a:r>
           </a:p>
         </p:txBody>
@@ -4902,7 +4902,7 @@
                 </a:solidFill>
                 <a:latin typeface="Arial"/>
               </a:rPr>
-              <a:t>N/C</a:t>
+              <a:t>N/A</a:t>
             </a:r>
           </a:p>
         </p:txBody>
@@ -4972,7 +4972,7 @@
                 </a:solidFill>
                 <a:latin typeface="Arial"/>
               </a:rPr>
-              <a:t>vs période préc.</a:t>
+              <a:t>vs prev. period</a:t>
             </a:r>
           </a:p>
         </p:txBody>
@@ -5042,7 +5042,7 @@
                 </a:solidFill>
                 <a:latin typeface="Arial"/>
               </a:rPr>
-              <a:t>INSIGHTS QUALITATIFS · ANALYSE DES RECHERCHES</a:t>
+              <a:t>QUALITATIVE INSIGHTS · SEARCH ANALYSIS</a:t>
             </a:r>
           </a:p>
         </p:txBody>
@@ -5215,7 +5215,7 @@
                 </a:solidFill>
                 <a:latin typeface="Arial"/>
               </a:rPr>
-              <a:t>CHAMP LEXICAL</a:t>
+              <a:t>LEXICAL FIELD</a:t>
             </a:r>
           </a:p>
         </p:txBody>
@@ -5250,7 +5250,7 @@
                 </a:solidFill>
                 <a:latin typeface="Arial"/>
               </a:rPr>
-              <a:t>Termes les plus fréquents</a:t>
+              <a:t>Most frequent terms</a:t>
             </a:r>
           </a:p>
         </p:txBody>
@@ -5289,7 +5289,7 @@
                 </a:solidFill>
                 <a:latin typeface="Arial"/>
               </a:rPr>
-              <a:t>jean</a:t>
+              <a:t>jeans</a:t>
             </a:r>
             <a:r>
               <a:rPr sz="1600" b="1" i="0">
@@ -5314,7 +5314,7 @@
                 </a:solidFill>
                 <a:latin typeface="Arial"/>
               </a:rPr>
-              <a:t>jean tulipe</a:t>
+              <a:t>tulip jeans</a:t>
             </a:r>
             <a:r>
               <a:rPr sz="1400" b="1" i="0">
@@ -5323,7 +5323,7 @@
                 </a:solidFill>
                 <a:latin typeface="Arial"/>
               </a:rPr>
-              <a:t>   élasthanne</a:t>
+              <a:t>   stretch</a:t>
             </a:r>
           </a:p>
           <a:p>
@@ -5339,7 +5339,7 @@
                 </a:solidFill>
                 <a:latin typeface="Arial"/>
               </a:rPr>
-              <a:t>hauts ajustés</a:t>
+              <a:t>fitted tops</a:t>
             </a:r>
             <a:r>
               <a:rPr sz="1200" b="0" i="0">
@@ -5348,7 +5348,7 @@
                 </a:solidFill>
                 <a:latin typeface="Arial"/>
               </a:rPr>
-              <a:t>   doudoune</a:t>
+              <a:t>   puffer jacket</a:t>
             </a:r>
           </a:p>
           <a:p>
@@ -5364,7 +5364,7 @@
                 </a:solidFill>
                 <a:latin typeface="Arial"/>
               </a:rPr>
-              <a:t>jupe en jean</a:t>
+              <a:t>denim skirt</a:t>
             </a:r>
             <a:r>
               <a:rPr sz="1100" b="1" i="0">
@@ -5373,7 +5373,7 @@
                 </a:solidFill>
                 <a:latin typeface="Arial"/>
               </a:rPr>
-              <a:t>   veste</a:t>
+              <a:t>   jacket</a:t>
             </a:r>
           </a:p>
           <a:p>
@@ -5423,7 +5423,7 @@
                 </a:solidFill>
                 <a:latin typeface="Arial"/>
               </a:rPr>
-              <a:t>collants</a:t>
+              <a:t>tights</a:t>
             </a:r>
             <a:r>
               <a:rPr sz="1100" b="0" i="0">
@@ -5467,7 +5467,7 @@
                 </a:solidFill>
                 <a:latin typeface="Arial"/>
               </a:rPr>
-              <a:t>EXEMPLES DE REQUÊTES</a:t>
+              <a:t>SAMPLE QUERIES</a:t>
             </a:r>
           </a:p>
         </p:txBody>
@@ -5502,7 +5502,7 @@
                 </a:solidFill>
                 <a:latin typeface="Arial"/>
               </a:rPr>
-              <a:t>Questions posées aux IA</a:t>
+              <a:t>Questions asked to AI</a:t>
             </a:r>
           </a:p>
         </p:txBody>
@@ -5616,7 +5616,7 @@
                 </a:solidFill>
                 <a:latin typeface="Arial"/>
               </a:rPr>
-              <a:t>Montre-moi des hauts ajustés pour accompagner ce jean gris</a:t>
+              <a:t>Show me fitted tops to go with these grey jeans</a:t>
             </a:r>
           </a:p>
         </p:txBody>
@@ -5730,7 +5730,7 @@
                 </a:solidFill>
                 <a:latin typeface="Arial"/>
               </a:rPr>
-              <a:t>Où trouver des jeans tulipe confortables avec un peu d'élasthanne ?</a:t>
+              <a:t>Where can I find comfortable tulip jeans with a little stretch?</a:t>
             </a:r>
           </a:p>
         </p:txBody>
@@ -5844,7 +5844,7 @@
                 </a:solidFill>
                 <a:latin typeface="Arial"/>
               </a:rPr>
-              <a:t>Montre-moi des idées de tenues complètes avec la jupe en jean longue</a:t>
+              <a:t>Show me complete outfit ideas with a long denim skirt</a:t>
             </a:r>
           </a:p>
         </p:txBody>
@@ -5958,7 +5958,7 @@
                 </a:solidFill>
                 <a:latin typeface="Arial"/>
               </a:rPr>
-              <a:t>C'est quoi la vraie différence entre une softshell et une doudoune ?</a:t>
+              <a:t>What's the real difference between a softshell and a puffer jacket?</a:t>
             </a:r>
           </a:p>
         </p:txBody>
@@ -6072,7 +6072,7 @@
                 </a:solidFill>
                 <a:latin typeface="Arial"/>
               </a:rPr>
-              <a:t>Peut-on porter ce short au bureau sans être trop décontractée ?</a:t>
+              <a:t>Can I wear these shorts to the office without looking too casual?</a:t>
             </a:r>
           </a:p>
         </p:txBody>
@@ -6107,7 +6107,7 @@
                 </a:solidFill>
                 <a:latin typeface="Arial"/>
               </a:rPr>
-              <a:t>CATÉGORIES DE PRODUITS</a:t>
+              <a:t>PRODUCT CATEGORIES</a:t>
             </a:r>
           </a:p>
         </p:txBody>
@@ -6142,7 +6142,7 @@
                 </a:solidFill>
                 <a:latin typeface="Arial"/>
               </a:rPr>
-              <a:t>Répartition des requêtes</a:t>
+              <a:t>Campaign product mix</a:t>
             </a:r>
           </a:p>
         </p:txBody>
@@ -6235,7 +6235,7 @@
         <p:spPr>
           <a:xfrm>
             <a:off x="8296656" y="4389120"/>
-            <a:ext cx="2072640" cy="152400"/>
+            <a:ext cx="2225040" cy="152400"/>
           </a:xfrm>
           <a:prstGeom prst="rect">
             <a:avLst/>
@@ -6256,7 +6256,7 @@
                 </a:solidFill>
                 <a:latin typeface="Arial"/>
               </a:rPr>
-              <a:t>Hauts et pantalons</a:t>
+              <a:t>Jeans</a:t>
             </a:r>
           </a:p>
         </p:txBody>
@@ -6269,7 +6269,7 @@
         </p:nvSpPr>
         <p:spPr>
           <a:xfrm>
-            <a:off x="8077200" y="4675632"/>
+            <a:off x="8077200" y="4626864"/>
             <a:ext cx="121920" cy="121920"/>
           </a:xfrm>
           <a:prstGeom prst="rect">
@@ -6313,8 +6313,8 @@
         </p:nvSpPr>
         <p:spPr>
           <a:xfrm>
-            <a:off x="8296656" y="4657344"/>
-            <a:ext cx="2072640" cy="152400"/>
+            <a:off x="8296656" y="4608576"/>
+            <a:ext cx="2225040" cy="152400"/>
           </a:xfrm>
           <a:prstGeom prst="rect">
             <a:avLst/>
@@ -6335,7 +6335,7 @@
                 </a:solidFill>
                 <a:latin typeface="Arial"/>
               </a:rPr>
-              <a:t>Vestes et plein air · 21 %</a:t>
+              <a:t>Tops and shirts · 25 %</a:t>
             </a:r>
           </a:p>
         </p:txBody>
@@ -6348,7 +6348,7 @@
         </p:nvSpPr>
         <p:spPr>
           <a:xfrm>
-            <a:off x="8077200" y="4943856"/>
+            <a:off x="8077200" y="4846320"/>
             <a:ext cx="121920" cy="121920"/>
           </a:xfrm>
           <a:prstGeom prst="rect">
@@ -6392,8 +6392,8 @@
         </p:nvSpPr>
         <p:spPr>
           <a:xfrm>
-            <a:off x="8296656" y="4925568"/>
-            <a:ext cx="2072640" cy="152400"/>
+            <a:off x="8296656" y="4828032"/>
+            <a:ext cx="2225040" cy="152400"/>
           </a:xfrm>
           <a:prstGeom prst="rect">
             <a:avLst/>
@@ -6414,7 +6414,7 @@
                 </a:solidFill>
                 <a:latin typeface="Arial"/>
               </a:rPr>
-              <a:t>Sport et cyclisme · 11 %</a:t>
+              <a:t>Dresses, skirts and shorts · 11 %</a:t>
             </a:r>
           </a:p>
         </p:txBody>
@@ -6427,7 +6427,7 @@
         </p:nvSpPr>
         <p:spPr>
           <a:xfrm>
-            <a:off x="8077200" y="5212080"/>
+            <a:off x="8077200" y="5065776"/>
             <a:ext cx="121920" cy="121920"/>
           </a:xfrm>
           <a:prstGeom prst="rect">
@@ -6471,8 +6471,8 @@
         </p:nvSpPr>
         <p:spPr>
           <a:xfrm>
-            <a:off x="8296656" y="5193792"/>
-            <a:ext cx="2072640" cy="152400"/>
+            <a:off x="8296656" y="5047488"/>
+            <a:ext cx="2225040" cy="152400"/>
           </a:xfrm>
           <a:prstGeom prst="rect">
             <a:avLst/>
@@ -6493,7 +6493,7 @@
                 </a:solidFill>
                 <a:latin typeface="Arial"/>
               </a:rPr>
-              <a:t>Robes et jupes · 13 %</a:t>
+              <a:t>Accessories · 9 %</a:t>
             </a:r>
           </a:p>
         </p:txBody>
@@ -6506,7 +6506,7 @@
         </p:nvSpPr>
         <p:spPr>
           <a:xfrm>
-            <a:off x="8077200" y="5480304"/>
+            <a:off x="8077200" y="5285232"/>
             <a:ext cx="121920" cy="121920"/>
           </a:xfrm>
           <a:prstGeom prst="rect">
@@ -6550,8 +6550,8 @@
         </p:nvSpPr>
         <p:spPr>
           <a:xfrm>
-            <a:off x="8296656" y="5462016"/>
-            <a:ext cx="2072640" cy="152400"/>
+            <a:off x="8296656" y="5266944"/>
+            <a:ext cx="2225040" cy="152400"/>
           </a:xfrm>
           <a:prstGeom prst="rect">
             <a:avLst/>
@@ -6572,7 +6572,7 @@
                 </a:solidFill>
                 <a:latin typeface="Arial"/>
               </a:rPr>
-              <a:t>Lingerie et chaussettes · 12 %</a:t>
+              <a:t>Other relaxed bottoms · 8 %</a:t>
             </a:r>
           </a:p>
         </p:txBody>
@@ -6585,7 +6585,7 @@
         </p:nvSpPr>
         <p:spPr>
           <a:xfrm>
-            <a:off x="8077200" y="5748528"/>
+            <a:off x="8077200" y="5504688"/>
             <a:ext cx="121920" cy="121920"/>
           </a:xfrm>
           <a:prstGeom prst="rect">
@@ -6629,8 +6629,8 @@
         </p:nvSpPr>
         <p:spPr>
           <a:xfrm>
-            <a:off x="8296656" y="5730240"/>
-            <a:ext cx="2072640" cy="152400"/>
+            <a:off x="8296656" y="5486400"/>
+            <a:ext cx="2225040" cy="152400"/>
           </a:xfrm>
           <a:prstGeom prst="rect">
             <a:avLst/>
@@ -6651,7 +6651,7 @@
                 </a:solidFill>
                 <a:latin typeface="Arial"/>
               </a:rPr>
-              <a:t>Autres · 14 %</a:t>
+              <a:t>Jackets · 7 %</a:t>
             </a:r>
           </a:p>
         </p:txBody>
@@ -6664,8 +6664,87 @@
         </p:nvSpPr>
         <p:spPr>
           <a:xfrm>
+            <a:off x="8077200" y="5724144"/>
+            <a:ext cx="121920" cy="121920"/>
+          </a:xfrm>
+          <a:prstGeom prst="rect">
+            <a:avLst/>
+          </a:prstGeom>
+          <a:solidFill>
+            <a:srgbClr val="8CB36B"/>
+          </a:solidFill>
+          <a:ln>
+            <a:noFill/>
+          </a:ln>
+          <a:effectLst/>
+        </p:spPr>
+        <p:style>
+          <a:lnRef idx="1">
+            <a:schemeClr val="accent1"/>
+          </a:lnRef>
+          <a:fillRef idx="3">
+            <a:schemeClr val="accent1"/>
+          </a:fillRef>
+          <a:effectRef idx="2">
+            <a:schemeClr val="accent1"/>
+          </a:effectRef>
+          <a:fontRef idx="minor">
+            <a:schemeClr val="lt1"/>
+          </a:fontRef>
+        </p:style>
+        <p:txBody>
+          <a:bodyPr rtlCol="0" anchor="ctr"/>
+          <a:lstStyle/>
+          <a:p>
+            <a:pPr algn="ctr"/>
+          </a:p>
+        </p:txBody>
+      </p:sp>
+      <p:sp>
+        <p:nvSpPr>
+          <p:cNvPr id="93" name="TextBox 92"/>
+          <p:cNvSpPr txBox="1"/>
+          <p:nvPr/>
+        </p:nvSpPr>
+        <p:spPr>
+          <a:xfrm>
+            <a:off x="8296656" y="5705856"/>
+            <a:ext cx="2225040" cy="152400"/>
+          </a:xfrm>
+          <a:prstGeom prst="rect">
+            <a:avLst/>
+          </a:prstGeom>
+          <a:noFill/>
+        </p:spPr>
+        <p:txBody>
+          <a:bodyPr wrap="square" anchor="t" lIns="0" rIns="0" tIns="0" bIns="0">
+            <a:spAutoFit/>
+          </a:bodyPr>
+          <a:lstStyle/>
+          <a:p>
+            <a:pPr algn="l"/>
+            <a:r>
+              <a:rPr sz="1000" b="0" i="0">
+                <a:solidFill>
+                  <a:srgbClr val="111111"/>
+                </a:solidFill>
+                <a:latin typeface="Arial"/>
+              </a:rPr>
+              <a:t>Chinos and cargos · 3 %</a:t>
+            </a:r>
+          </a:p>
+        </p:txBody>
+      </p:sp>
+      <p:sp>
+        <p:nvSpPr>
+          <p:cNvPr id="94" name="Rectangle 93"/>
+          <p:cNvSpPr/>
+          <p:nvPr/>
+        </p:nvSpPr>
+        <p:spPr>
+          <a:xfrm>
             <a:off x="10564368" y="4450080"/>
-            <a:ext cx="475488" cy="388924"/>
+            <a:ext cx="475488" cy="496214"/>
           </a:xfrm>
           <a:prstGeom prst="rect">
             <a:avLst/>
@@ -6702,14 +6781,14 @@
       </p:sp>
       <p:sp>
         <p:nvSpPr>
-          <p:cNvPr id="93" name="TextBox 92"/>
+          <p:cNvPr id="95" name="TextBox 94"/>
           <p:cNvSpPr txBox="1"/>
           <p:nvPr/>
         </p:nvSpPr>
         <p:spPr>
           <a:xfrm>
             <a:off x="10564368" y="4450080"/>
-            <a:ext cx="475488" cy="388924"/>
+            <a:ext cx="475488" cy="496214"/>
           </a:xfrm>
           <a:prstGeom prst="rect">
             <a:avLst/>
@@ -6730,21 +6809,21 @@
                 </a:solidFill>
                 <a:latin typeface="Arial"/>
               </a:rPr>
-              <a:t>29 %</a:t>
-            </a:r>
-          </a:p>
-        </p:txBody>
-      </p:sp>
-      <p:sp>
-        <p:nvSpPr>
-          <p:cNvPr id="94" name="Rectangle 93"/>
+              <a:t>37 %</a:t>
+            </a:r>
+          </a:p>
+        </p:txBody>
+      </p:sp>
+      <p:sp>
+        <p:nvSpPr>
+          <p:cNvPr id="96" name="Rectangle 95"/>
           <p:cNvSpPr/>
           <p:nvPr/>
         </p:nvSpPr>
         <p:spPr>
           <a:xfrm>
-            <a:off x="10564368" y="4839004"/>
-            <a:ext cx="475488" cy="281635"/>
+            <a:off x="10564368" y="4946294"/>
+            <a:ext cx="475488" cy="335280"/>
           </a:xfrm>
           <a:prstGeom prst="rect">
             <a:avLst/>
@@ -6781,13 +6860,48 @@
       </p:sp>
       <p:sp>
         <p:nvSpPr>
-          <p:cNvPr id="95" name="Rectangle 94"/>
+          <p:cNvPr id="97" name="TextBox 96"/>
+          <p:cNvSpPr txBox="1"/>
+          <p:nvPr/>
+        </p:nvSpPr>
+        <p:spPr>
+          <a:xfrm>
+            <a:off x="10564368" y="4946294"/>
+            <a:ext cx="475488" cy="335280"/>
+          </a:xfrm>
+          <a:prstGeom prst="rect">
+            <a:avLst/>
+          </a:prstGeom>
+          <a:noFill/>
+        </p:spPr>
+        <p:txBody>
+          <a:bodyPr wrap="square" anchor="ctr" lIns="0" rIns="0" tIns="0" bIns="0">
+            <a:spAutoFit/>
+          </a:bodyPr>
+          <a:lstStyle/>
+          <a:p>
+            <a:pPr algn="ctr"/>
+            <a:r>
+              <a:rPr sz="1000" b="1" i="0">
+                <a:solidFill>
+                  <a:srgbClr val="FFFFFF"/>
+                </a:solidFill>
+                <a:latin typeface="Arial"/>
+              </a:rPr>
+              <a:t>25 %</a:t>
+            </a:r>
+          </a:p>
+        </p:txBody>
+      </p:sp>
+      <p:sp>
+        <p:nvSpPr>
+          <p:cNvPr id="98" name="Rectangle 97"/>
           <p:cNvSpPr/>
           <p:nvPr/>
         </p:nvSpPr>
         <p:spPr>
           <a:xfrm>
-            <a:off x="10564368" y="5120640"/>
+            <a:off x="10564368" y="5281574"/>
             <a:ext cx="475488" cy="147523"/>
           </a:xfrm>
           <a:prstGeom prst="rect">
@@ -6825,14 +6939,14 @@
       </p:sp>
       <p:sp>
         <p:nvSpPr>
-          <p:cNvPr id="96" name="Rectangle 95"/>
+          <p:cNvPr id="99" name="Rectangle 98"/>
           <p:cNvSpPr/>
           <p:nvPr/>
         </p:nvSpPr>
         <p:spPr>
           <a:xfrm>
-            <a:off x="10564368" y="5268163"/>
-            <a:ext cx="475488" cy="174345"/>
+            <a:off x="10564368" y="5429097"/>
+            <a:ext cx="475488" cy="120700"/>
           </a:xfrm>
           <a:prstGeom prst="rect">
             <a:avLst/>
@@ -6869,14 +6983,14 @@
       </p:sp>
       <p:sp>
         <p:nvSpPr>
-          <p:cNvPr id="97" name="Rectangle 96"/>
+          <p:cNvPr id="100" name="Rectangle 99"/>
           <p:cNvSpPr/>
           <p:nvPr/>
         </p:nvSpPr>
         <p:spPr>
           <a:xfrm>
-            <a:off x="10564368" y="5442508"/>
-            <a:ext cx="475488" cy="160934"/>
+            <a:off x="10564368" y="5549798"/>
+            <a:ext cx="475488" cy="107289"/>
           </a:xfrm>
           <a:prstGeom prst="rect">
             <a:avLst/>
@@ -6913,20 +7027,64 @@
       </p:sp>
       <p:sp>
         <p:nvSpPr>
-          <p:cNvPr id="98" name="Rectangle 97"/>
+          <p:cNvPr id="101" name="Rectangle 100"/>
           <p:cNvSpPr/>
           <p:nvPr/>
         </p:nvSpPr>
         <p:spPr>
           <a:xfrm>
-            <a:off x="10564368" y="5603443"/>
-            <a:ext cx="475488" cy="187756"/>
+            <a:off x="10564368" y="5657088"/>
+            <a:ext cx="475488" cy="93878"/>
           </a:xfrm>
           <a:prstGeom prst="rect">
             <a:avLst/>
           </a:prstGeom>
           <a:solidFill>
             <a:srgbClr val="A09278"/>
+          </a:solidFill>
+          <a:ln>
+            <a:noFill/>
+          </a:ln>
+          <a:effectLst/>
+        </p:spPr>
+        <p:style>
+          <a:lnRef idx="1">
+            <a:schemeClr val="accent1"/>
+          </a:lnRef>
+          <a:fillRef idx="3">
+            <a:schemeClr val="accent1"/>
+          </a:fillRef>
+          <a:effectRef idx="2">
+            <a:schemeClr val="accent1"/>
+          </a:effectRef>
+          <a:fontRef idx="minor">
+            <a:schemeClr val="lt1"/>
+          </a:fontRef>
+        </p:style>
+        <p:txBody>
+          <a:bodyPr rtlCol="0" anchor="ctr"/>
+          <a:lstStyle/>
+          <a:p>
+            <a:pPr algn="ctr"/>
+          </a:p>
+        </p:txBody>
+      </p:sp>
+      <p:sp>
+        <p:nvSpPr>
+          <p:cNvPr id="102" name="Rectangle 101"/>
+          <p:cNvSpPr/>
+          <p:nvPr/>
+        </p:nvSpPr>
+        <p:spPr>
+          <a:xfrm>
+            <a:off x="10564368" y="5750966"/>
+            <a:ext cx="475488" cy="40233"/>
+          </a:xfrm>
+          <a:prstGeom prst="rect">
+            <a:avLst/>
+          </a:prstGeom>
+          <a:solidFill>
+            <a:srgbClr val="8CB36B"/>
           </a:solidFill>
           <a:ln>
             <a:noFill/>
@@ -7091,7 +7249,7 @@
                 </a:solidFill>
                 <a:latin typeface="Arial"/>
               </a:rPr>
-              <a:t>INSIGHTS QUALITATIFS · SEPTEMBRE 2026</a:t>
+              <a:t>QUALITATIVE INSIGHTS · SEPTEMBER 2026</a:t>
             </a:r>
           </a:p>
         </p:txBody>
@@ -7196,7 +7354,7 @@
                 </a:solidFill>
                 <a:latin typeface="Arial"/>
               </a:rPr>
-              <a:t>OBJECTIF   </a:t>
+              <a:t>OBJECTIVE   </a:t>
             </a:r>
             <a:r>
               <a:rPr sz="1300" b="0" i="0">
@@ -7205,7 +7363,7 @@
                 </a:solidFill>
                 <a:latin typeface="Arial"/>
               </a:rPr>
-              <a:t>À définir</a:t>
+              <a:t>To be defined</a:t>
             </a:r>
           </a:p>
         </p:txBody>
@@ -7240,7 +7398,7 @@
                 </a:solidFill>
                 <a:latin typeface="Arial"/>
               </a:rPr>
-              <a:t>INSIGHTS QUALITATIFS</a:t>
+              <a:t>QUALITATIVE INSIGHTS</a:t>
             </a:r>
           </a:p>
         </p:txBody>
@@ -7356,7 +7514,7 @@
                 </a:solidFill>
                 <a:latin typeface="Arial"/>
               </a:rPr>
-              <a:t>Le jean comme pièce centrale du look</a:t>
+              <a:t>Jeans as the centre of the outfit</a:t>
             </a:r>
           </a:p>
         </p:txBody>
@@ -7391,7 +7549,7 @@
                 </a:solidFill>
                 <a:latin typeface="Arial"/>
               </a:rPr>
-              <a:t>Les requêtes partent souvent du jean pour construire une tenue : hauts à associer, jupe en jean, jean tulipe avec élasthanne.</a:t>
+              <a:t>Queries often start from the jeans to build a look: tops to pair with them, a denim skirt, tulip jeans with stretch.</a:t>
             </a:r>
           </a:p>
         </p:txBody>
@@ -7426,7 +7584,7 @@
                 </a:solidFill>
                 <a:latin typeface="Arial"/>
               </a:rPr>
-              <a:t>→  Construire les accroches autour du look complet : « Le 501 et le haut qui va avec ».</a:t>
+              <a:t>→  Build messages around the complete outfit: « The 501 and the top that goes with it ».</a:t>
             </a:r>
           </a:p>
         </p:txBody>
@@ -7542,7 +7700,7 @@
                 </a:solidFill>
                 <a:latin typeface="Arial"/>
               </a:rPr>
-              <a:t>Mettre en avant le 501</a:t>
+              <a:t>Put the 501 forward</a:t>
             </a:r>
           </a:p>
         </p:txBody>
@@ -7577,7 +7735,7 @@
                 </a:solidFill>
                 <a:latin typeface="Arial"/>
               </a:rPr>
-              <a:t>Levi's représente 41,1 % des recherches qui nomment une marque, et le 501 Original Fit est le seul modèle cité.</a:t>
+              <a:t>Levi's accounts for 41.1% of searches naming a brand, and the 501 Original Fit is the only model cited.</a:t>
             </a:r>
           </a:p>
         </p:txBody>
@@ -7612,7 +7770,7 @@
                 </a:solidFill>
                 <a:latin typeface="Arial"/>
               </a:rPr>
-              <a:t>→  Faire du 501 le produit d'appel des campagnes.</a:t>
+              <a:t>→  Make the 501 the lead product of the campaign.</a:t>
             </a:r>
           </a:p>
         </p:txBody>
@@ -7728,7 +7886,7 @@
                 </a:solidFill>
                 <a:latin typeface="Arial"/>
               </a:rPr>
-              <a:t>3e marque, devant tous les spécialistes du jean</a:t>
+              <a:t>3rd brand, ahead of every denim specialist</a:t>
             </a:r>
           </a:p>
         </p:txBody>
@@ -7763,7 +7921,7 @@
                 </a:solidFill>
                 <a:latin typeface="Arial"/>
               </a:rPr>
-              <a:t>Levi's est 3e en part de voix (17,6 %, +5,7 pts), derrière Zara et Uniqlo. Dans les recommandations spontanées des IA, Levi's recule à 7,9 % (−4,4 pts). Côté ads : 14,1 % (−0,6 pt).</a:t>
+              <a:t>Levi's ranks 3rd in share of voice (17.6%, +5.7 pts), behind Zara and Uniqlo. In AI spontaneous recommendations, Levi's drops to 7.9% (−4.4 pts). Ads share: 14.1% (−0.6 pt).</a:t>
             </a:r>
           </a:p>
         </p:txBody>
@@ -7798,7 +7956,7 @@
                 </a:solidFill>
                 <a:latin typeface="Arial"/>
               </a:rPr>
-              <a:t>→  Maintenir la présence ads et renforcer les contenus pour regagner les recommandations spontanées.</a:t>
+              <a:t>→  Keep ad presence and strengthen brand content to win back spontaneous recommendations.</a:t>
             </a:r>
           </a:p>
         </p:txBody>
@@ -7914,7 +8072,7 @@
                 </a:solidFill>
                 <a:latin typeface="Arial"/>
               </a:rPr>
-              <a:t>Moins d'impressions, plus de clics</a:t>
+              <a:t>Fewer impressions, more clicks</a:t>
             </a:r>
           </a:p>
         </p:txBody>
@@ -7949,7 +8107,7 @@
                 </a:solidFill>
                 <a:latin typeface="Arial"/>
               </a:rPr>
-              <a:t>Les impressions baissent de 29 %, mais les clics progressent de 46 %. Le CTR passe de 0,22 % à 0,44 %.</a:t>
+              <a:t>Impressions fall 29% but clicks rise 46%. CTR goes from 0.22% to 0.44%.</a:t>
             </a:r>
           </a:p>
         </p:txBody>
@@ -7984,7 +8142,7 @@
                 </a:solidFill>
                 <a:latin typeface="Arial"/>
               </a:rPr>
-              <a:t>→  Garder le ciblage et décliner les accroches sur la saison froide (vestes, doudounes).</a:t>
+              <a:t>→  Keep the targeting and extend messages to the cold season (jackets, Trucker, outerwear).</a:t>
             </a:r>
           </a:p>
         </p:txBody>

--- a/rapports/septembre/Levis_sept2026.pptx
+++ b/rapports/septembre/Levis_sept2026.pptx
@@ -6335,7 +6335,7 @@
                 </a:solidFill>
                 <a:latin typeface="Arial"/>
               </a:rPr>
-              <a:t>Tops and shirts · 25 %</a:t>
+              <a:t>Tops and shirts · 23 %</a:t>
             </a:r>
           </a:p>
         </p:txBody>
@@ -6414,7 +6414,7 @@
                 </a:solidFill>
                 <a:latin typeface="Arial"/>
               </a:rPr>
-              <a:t>Dresses, skirts and shorts · 11 %</a:t>
+              <a:t>Dresses, skirts and shorts · 9 %</a:t>
             </a:r>
           </a:p>
         </p:txBody>
@@ -6493,7 +6493,7 @@
                 </a:solidFill>
                 <a:latin typeface="Arial"/>
               </a:rPr>
-              <a:t>Accessories · 9 %</a:t>
+              <a:t>Accessories · 22 %</a:t>
             </a:r>
           </a:p>
         </p:txBody>
@@ -6572,7 +6572,7 @@
                 </a:solidFill>
                 <a:latin typeface="Arial"/>
               </a:rPr>
-              <a:t>Other relaxed bottoms · 8 %</a:t>
+              <a:t>Other relaxed bottoms · &lt; 1%</a:t>
             </a:r>
           </a:p>
         </p:txBody>
@@ -6651,7 +6651,7 @@
                 </a:solidFill>
                 <a:latin typeface="Arial"/>
               </a:rPr>
-              <a:t>Jackets · 7 %</a:t>
+              <a:t>Jackets · 6 %</a:t>
             </a:r>
           </a:p>
         </p:txBody>
@@ -6730,7 +6730,7 @@
                 </a:solidFill>
                 <a:latin typeface="Arial"/>
               </a:rPr>
-              <a:t>Chinos and cargos · 3 %</a:t>
+              <a:t>Chinos and cargos · 1 %</a:t>
             </a:r>
           </a:p>
         </p:txBody>
@@ -6744,7 +6744,7 @@
         <p:spPr>
           <a:xfrm>
             <a:off x="10564368" y="4450080"/>
-            <a:ext cx="475488" cy="496214"/>
+            <a:ext cx="475488" cy="523036"/>
           </a:xfrm>
           <a:prstGeom prst="rect">
             <a:avLst/>
@@ -6788,7 +6788,7 @@
         <p:spPr>
           <a:xfrm>
             <a:off x="10564368" y="4450080"/>
-            <a:ext cx="475488" cy="496214"/>
+            <a:ext cx="475488" cy="523036"/>
           </a:xfrm>
           <a:prstGeom prst="rect">
             <a:avLst/>
@@ -6809,7 +6809,7 @@
                 </a:solidFill>
                 <a:latin typeface="Arial"/>
               </a:rPr>
-              <a:t>37 %</a:t>
+              <a:t>39 %</a:t>
             </a:r>
           </a:p>
         </p:txBody>
@@ -6822,8 +6822,8 @@
         </p:nvSpPr>
         <p:spPr>
           <a:xfrm>
-            <a:off x="10564368" y="4946294"/>
-            <a:ext cx="475488" cy="335280"/>
+            <a:off x="10564368" y="4973116"/>
+            <a:ext cx="475488" cy="308457"/>
           </a:xfrm>
           <a:prstGeom prst="rect">
             <a:avLst/>
@@ -6860,49 +6860,14 @@
       </p:sp>
       <p:sp>
         <p:nvSpPr>
-          <p:cNvPr id="97" name="TextBox 96"/>
-          <p:cNvSpPr txBox="1"/>
-          <p:nvPr/>
-        </p:nvSpPr>
-        <p:spPr>
-          <a:xfrm>
-            <a:off x="10564368" y="4946294"/>
-            <a:ext cx="475488" cy="335280"/>
-          </a:xfrm>
-          <a:prstGeom prst="rect">
-            <a:avLst/>
-          </a:prstGeom>
-          <a:noFill/>
-        </p:spPr>
-        <p:txBody>
-          <a:bodyPr wrap="square" anchor="ctr" lIns="0" rIns="0" tIns="0" bIns="0">
-            <a:spAutoFit/>
-          </a:bodyPr>
-          <a:lstStyle/>
-          <a:p>
-            <a:pPr algn="ctr"/>
-            <a:r>
-              <a:rPr sz="1000" b="1" i="0">
-                <a:solidFill>
-                  <a:srgbClr val="FFFFFF"/>
-                </a:solidFill>
-                <a:latin typeface="Arial"/>
-              </a:rPr>
-              <a:t>25 %</a:t>
-            </a:r>
-          </a:p>
-        </p:txBody>
-      </p:sp>
-      <p:sp>
-        <p:nvSpPr>
-          <p:cNvPr id="98" name="Rectangle 97"/>
+          <p:cNvPr id="97" name="Rectangle 96"/>
           <p:cNvSpPr/>
           <p:nvPr/>
         </p:nvSpPr>
         <p:spPr>
           <a:xfrm>
             <a:off x="10564368" y="5281574"/>
-            <a:ext cx="475488" cy="147523"/>
+            <a:ext cx="475488" cy="120700"/>
           </a:xfrm>
           <a:prstGeom prst="rect">
             <a:avLst/>
@@ -6939,14 +6904,14 @@
       </p:sp>
       <p:sp>
         <p:nvSpPr>
-          <p:cNvPr id="99" name="Rectangle 98"/>
+          <p:cNvPr id="98" name="Rectangle 97"/>
           <p:cNvSpPr/>
           <p:nvPr/>
         </p:nvSpPr>
         <p:spPr>
           <a:xfrm>
-            <a:off x="10564368" y="5429097"/>
-            <a:ext cx="475488" cy="120700"/>
+            <a:off x="10564368" y="5402275"/>
+            <a:ext cx="475488" cy="295046"/>
           </a:xfrm>
           <a:prstGeom prst="rect">
             <a:avLst/>
@@ -6983,14 +6948,14 @@
       </p:sp>
       <p:sp>
         <p:nvSpPr>
-          <p:cNvPr id="100" name="Rectangle 99"/>
+          <p:cNvPr id="99" name="Rectangle 98"/>
           <p:cNvSpPr/>
           <p:nvPr/>
         </p:nvSpPr>
         <p:spPr>
           <a:xfrm>
-            <a:off x="10564368" y="5549798"/>
-            <a:ext cx="475488" cy="107289"/>
+            <a:off x="10564368" y="5697321"/>
+            <a:ext cx="475488" cy="0"/>
           </a:xfrm>
           <a:prstGeom prst="rect">
             <a:avLst/>
@@ -7027,14 +6992,14 @@
       </p:sp>
       <p:sp>
         <p:nvSpPr>
-          <p:cNvPr id="101" name="Rectangle 100"/>
+          <p:cNvPr id="100" name="Rectangle 99"/>
           <p:cNvSpPr/>
           <p:nvPr/>
         </p:nvSpPr>
         <p:spPr>
           <a:xfrm>
-            <a:off x="10564368" y="5657088"/>
-            <a:ext cx="475488" cy="93878"/>
+            <a:off x="10564368" y="5697321"/>
+            <a:ext cx="475488" cy="80467"/>
           </a:xfrm>
           <a:prstGeom prst="rect">
             <a:avLst/>
@@ -7071,14 +7036,14 @@
       </p:sp>
       <p:sp>
         <p:nvSpPr>
-          <p:cNvPr id="102" name="Rectangle 101"/>
+          <p:cNvPr id="101" name="Rectangle 100"/>
           <p:cNvSpPr/>
           <p:nvPr/>
         </p:nvSpPr>
         <p:spPr>
           <a:xfrm>
-            <a:off x="10564368" y="5750966"/>
-            <a:ext cx="475488" cy="40233"/>
+            <a:off x="10564368" y="5777788"/>
+            <a:ext cx="475488" cy="13411"/>
           </a:xfrm>
           <a:prstGeom prst="rect">
             <a:avLst/>
@@ -7514,7 +7479,7 @@
                 </a:solidFill>
                 <a:latin typeface="Arial"/>
               </a:rPr>
-              <a:t>Jeans as the centre of the outfit</a:t>
+              <a:t>Vintage and heritage pieces drive clicks</a:t>
             </a:r>
           </a:p>
         </p:txBody>
@@ -7549,7 +7514,7 @@
                 </a:solidFill>
                 <a:latin typeface="Arial"/>
               </a:rPr>
-              <a:t>Queries often start from the jeans to build a look: tops to pair with them, a denim skirt, tulip jeans with stretch.</a:t>
+              <a:t>The Vintage Red Tab™ T-shirt reaches 1.84 times the average CTR, the Vintage Boxy sweatshirt 1.31 times and the Trucker jacket 1.38 times.</a:t>
             </a:r>
           </a:p>
         </p:txBody>
@@ -7584,7 +7549,7 @@
                 </a:solidFill>
                 <a:latin typeface="Arial"/>
               </a:rPr>
-              <a:t>→  Build messages around the complete outfit: « The 501 and the top that goes with it ».</a:t>
+              <a:t>→  Put vintage and heritage pieces forward in the campaign.</a:t>
             </a:r>
           </a:p>
         </p:txBody>
@@ -7700,7 +7665,7 @@
                 </a:solidFill>
                 <a:latin typeface="Arial"/>
               </a:rPr>
-              <a:t>Put the 501 forward</a:t>
+              <a:t>Jeans stay above average</a:t>
             </a:r>
           </a:p>
         </p:txBody>
@@ -7735,7 +7700,7 @@
                 </a:solidFill>
                 <a:latin typeface="Arial"/>
               </a:rPr>
-              <a:t>Levi's accounts for 41.1% of searches naming a brand, and the 501 Original Fit is the only model cited.</a:t>
+              <a:t>Men's jeans reach 1.13 times the average and women's jeans 1.05 times. The XL Straight jean reaches 1.28 times.</a:t>
             </a:r>
           </a:p>
         </p:txBody>
@@ -7770,7 +7735,7 @@
                 </a:solidFill>
                 <a:latin typeface="Arial"/>
               </a:rPr>
-              <a:t>→  Make the 501 the lead product of the campaign.</a:t>
+              <a:t>→  Keep jeans at the centre, with a focus on relaxed and straight fits.</a:t>
             </a:r>
           </a:p>
         </p:txBody>
@@ -7886,7 +7851,7 @@
                 </a:solidFill>
                 <a:latin typeface="Arial"/>
               </a:rPr>
-              <a:t>3rd brand, ahead of every denim specialist</a:t>
+              <a:t>Accessories underperform</a:t>
             </a:r>
           </a:p>
         </p:txBody>
@@ -7921,7 +7886,7 @@
                 </a:solidFill>
                 <a:latin typeface="Arial"/>
               </a:rPr>
-              <a:t>Levi's ranks 3rd in share of voice (17.6%, +5.7 pts), behind Zara and Uniqlo. In AI spontaneous recommendations, Levi's drops to 7.9% (−4.4 pts). Ads share: 14.1% (−0.6 pt).</a:t>
+              <a:t>Belts, beanies and caps stay at 0.49 times the average.</a:t>
             </a:r>
           </a:p>
         </p:txBody>
@@ -7956,7 +7921,7 @@
                 </a:solidFill>
                 <a:latin typeface="Arial"/>
               </a:rPr>
-              <a:t>→  Keep ad presence and strengthen brand content to win back spontaneous recommendations.</a:t>
+              <a:t>→  Show accessories as a complement once the shopper has found their jeans.</a:t>
             </a:r>
           </a:p>
         </p:txBody>
@@ -8072,7 +8037,7 @@
                 </a:solidFill>
                 <a:latin typeface="Arial"/>
               </a:rPr>
-              <a:t>Fewer impressions, more clicks</a:t>
+              <a:t>Jackets and sweats are rising</a:t>
             </a:r>
           </a:p>
         </p:txBody>
@@ -8107,7 +8072,7 @@
                 </a:solidFill>
                 <a:latin typeface="Arial"/>
               </a:rPr>
-              <a:t>Impressions fall 29% but clicks rise 46%. CTR goes from 0.22% to 0.44%.</a:t>
+              <a:t>Jackets and sweats reach 1.24 times the average and skirts and dresses 1.20 times.</a:t>
             </a:r>
           </a:p>
         </p:txBody>
@@ -8142,7 +8107,7 @@
                 </a:solidFill>
                 <a:latin typeface="Arial"/>
               </a:rPr>
-              <a:t>→  Keep the targeting and extend messages to the cold season (jackets, Trucker, outerwear).</a:t>
+              <a:t>→  Push outerwear for the cold season (Trucker, sherpa, sweats).</a:t>
             </a:r>
           </a:p>
         </p:txBody>
